--- a/media/exports/reports/2025-11/overtime.pptx
+++ b/media/exports/reports/2025-11/overtime.pptx
@@ -214,46 +214,46 @@
                 <c:formatCode>0.0"%";[Red](0.0"%")</c:formatCode>
                 <c:ptCount val="14"/>
                 <c:pt idx="0">
-                  <c:v>1.5</c:v>
+                  <c:v>1.6</c:v>
                 </c:pt>
                 <c:pt idx="1">
-                  <c:v>1.3</c:v>
+                  <c:v>2.7</c:v>
                 </c:pt>
                 <c:pt idx="2">
-                  <c:v>1.9</c:v>
+                  <c:v>2.2</c:v>
                 </c:pt>
                 <c:pt idx="3">
-                  <c:v>2.3</c:v>
+                  <c:v>3.0</c:v>
                 </c:pt>
                 <c:pt idx="4">
-                  <c:v>2.8</c:v>
+                  <c:v>4.6</c:v>
                 </c:pt>
                 <c:pt idx="5">
-                  <c:v>2.4</c:v>
+                  <c:v>4.4</c:v>
                 </c:pt>
                 <c:pt idx="6">
                   <c:v>3.6</c:v>
                 </c:pt>
                 <c:pt idx="7">
-                  <c:v>2.6</c:v>
+                  <c:v>3.7</c:v>
                 </c:pt>
                 <c:pt idx="8">
                   <c:v>2.8</c:v>
                 </c:pt>
                 <c:pt idx="9">
-                  <c:v>2.4</c:v>
+                  <c:v>3.3</c:v>
                 </c:pt>
                 <c:pt idx="10">
-                  <c:v>4.6</c:v>
+                  <c:v>3.3</c:v>
                 </c:pt>
                 <c:pt idx="11">
-                  <c:v>3.0</c:v>
+                  <c:v>3.7</c:v>
                 </c:pt>
                 <c:pt idx="12">
-                  <c:v>4.0</c:v>
+                  <c:v>3.9</c:v>
                 </c:pt>
                 <c:pt idx="13">
-                  <c:v>3.9</c:v>
+                  <c:v>3.8</c:v>
                 </c:pt>
               </c:numCache>
             </c:numRef>
@@ -420,18 +420,29 @@
               </a:solidFill>
             </c:spPr>
           </c:dPt>
+          <c:dPt>
+            <c:idx val="3"/>
+            <c:spPr>
+              <a:solidFill>
+                <a:srgbClr val="0E9F6E"/>
+              </a:solidFill>
+            </c:spPr>
+          </c:dPt>
           <c:cat>
             <c:strRef>
-              <c:f>Sheet1!$A$2:$A$4</c:f>
+              <c:f>Sheet1!$A$2:$A$5</c:f>
               <c:strCache>
-                <c:ptCount val="3"/>
+                <c:ptCount val="4"/>
                 <c:pt idx="0">
-                  <c:v>Installation ran over</c:v>
+                  <c:v>Paperwork and quotes</c:v>
                 </c:pt>
                 <c:pt idx="1">
                   <c:v>Short-staffed</c:v>
                 </c:pt>
                 <c:pt idx="2">
+                  <c:v>Installation ran over</c:v>
+                </c:pt>
+                <c:pt idx="3">
                   <c:v>After-hours call-out</c:v>
                 </c:pt>
               </c:strCache>
@@ -439,18 +450,21 @@
           </c:cat>
           <c:val>
             <c:numRef>
-              <c:f>Sheet1!$B$2:$B$4</c:f>
+              <c:f>Sheet1!$B$2:$B$5</c:f>
               <c:numCache>
                 <c:formatCode>#,##0;[Red](#,##0)</c:formatCode>
-                <c:ptCount val="3"/>
+                <c:ptCount val="4"/>
                 <c:pt idx="0">
+                  <c:v>2.0</c:v>
+                </c:pt>
+                <c:pt idx="1">
                   <c:v>5.0</c:v>
                 </c:pt>
-                <c:pt idx="1">
-                  <c:v>6.0</c:v>
+                <c:pt idx="2">
+                  <c:v>11.5</c:v>
                 </c:pt>
-                <c:pt idx="2">
-                  <c:v>28.5</c:v>
+                <c:pt idx="3">
+                  <c:v>13.5</c:v>
                 </c:pt>
               </c:numCache>
             </c:numRef>
@@ -514,7 +528,7 @@
       <c:valAx>
         <c:axId val="-2113994440"/>
         <c:scaling>
-          <c:max val="32.775"/>
+          <c:max val="15.524999999999999"/>
           <c:min val="0.0"/>
         </c:scaling>
         <c:delete/>
@@ -620,29 +634,13 @@
               </a:solidFill>
             </c:spPr>
           </c:dPt>
-          <c:dPt>
-            <c:idx val="5"/>
-            <c:spPr>
-              <a:solidFill>
-                <a:srgbClr val="0E9F6E"/>
-              </a:solidFill>
-            </c:spPr>
-          </c:dPt>
-          <c:dPt>
-            <c:idx val="6"/>
-            <c:spPr>
-              <a:solidFill>
-                <a:srgbClr val="0E9F6E"/>
-              </a:solidFill>
-            </c:spPr>
-          </c:dPt>
           <c:cat>
             <c:strRef>
-              <c:f>Sheet1!$A$2:$A$8</c:f>
+              <c:f>Sheet1!$A$2:$A$6</c:f>
               <c:strCache>
-                <c:ptCount val="7"/>
+                <c:ptCount val="5"/>
                 <c:pt idx="0">
-                  <c:v>Technician T6</c:v>
+                  <c:v>Technician T3</c:v>
                 </c:pt>
                 <c:pt idx="1">
                   <c:v>Technician T2</c:v>
@@ -651,46 +649,34 @@
                   <c:v>Technician T1</c:v>
                 </c:pt>
                 <c:pt idx="3">
-                  <c:v>Technician T3</c:v>
+                  <c:v>Technician T4</c:v>
                 </c:pt>
                 <c:pt idx="4">
-                  <c:v>Technician T4</c:v>
-                </c:pt>
-                <c:pt idx="5">
                   <c:v>Technician T5</c:v>
-                </c:pt>
-                <c:pt idx="6">
-                  <c:v>Technician T7</c:v>
                 </c:pt>
               </c:strCache>
             </c:strRef>
           </c:cat>
           <c:val>
             <c:numRef>
-              <c:f>Sheet1!$B$2:$B$8</c:f>
+              <c:f>Sheet1!$B$2:$B$6</c:f>
               <c:numCache>
                 <c:formatCode>#,##0;[Red](#,##0)</c:formatCode>
-                <c:ptCount val="7"/>
+                <c:ptCount val="5"/>
                 <c:pt idx="0">
-                  <c:v>0.5</c:v>
+                  <c:v>2.0</c:v>
                 </c:pt>
                 <c:pt idx="1">
-                  <c:v>4.0</c:v>
+                  <c:v>3.0</c:v>
                 </c:pt>
                 <c:pt idx="2">
-                  <c:v>4.0</c:v>
+                  <c:v>6.0</c:v>
                 </c:pt>
                 <c:pt idx="3">
-                  <c:v>6.5</c:v>
+                  <c:v>8.5</c:v>
                 </c:pt>
                 <c:pt idx="4">
-                  <c:v>7.5</c:v>
-                </c:pt>
-                <c:pt idx="5">
-                  <c:v>7.5</c:v>
-                </c:pt>
-                <c:pt idx="6">
-                  <c:v>9.5</c:v>
+                  <c:v>12.5</c:v>
                 </c:pt>
               </c:numCache>
             </c:numRef>
@@ -754,7 +740,7 @@
       <c:valAx>
         <c:axId val="-2113994440"/>
         <c:scaling>
-          <c:max val="10.924999999999999"/>
+          <c:max val="14.374999999999998"/>
           <c:min val="0.0"/>
         </c:scaling>
         <c:delete/>
@@ -1251,7 +1237,7 @@
           <a:lstStyle/>
           <a:p>
             <a:r>
-              <a:t>Where is overtime creeping up, and why?. Overtime, November: 3.9%; Overtime hours, November: 39.5 h; November last year: 1.3%. Technicians worked 39.5 h of overtime in November, 3.9% of ordinary hours (target under 5.0%), against 4.0% in October. Over the last year it has gone from 1.3% to 3.9%. After-hours call-out is the main reason: 28.5 h, 72.2% of the overtime. Technician T7 carried the most (9.5 h).</a:t>
+              <a:t>Where is overtime creeping up, and why?. Overtime, November: 3.8%; Overtime hours, November: 32.0 h; November last year: 2.7%. Technicians worked 32.0 h of overtime in November, 3.8% of ordinary hours (target under 5.0%), against 3.9% in October. Over the last year it has gone from 2.7% to 3.8%. After-hours call-out is the main reason: 13.5 h, 42.2% of the overtime. Technician T5 carried the most (12.5 h).</a:t>
             </a:r>
           </a:p>
         </p:txBody>
@@ -4806,7 +4792,7 @@
                 </a:solidFill>
                 <a:latin typeface="Roboto"/>
               </a:rPr>
-              <a:t>Data retrieved 2pm, Tue 6 Oct 2026 · Generated 8 Oct 2026, 6:29pm · Sample data · Made with Python (python-pptx)</a:t>
+              <a:t>Data retrieved 2pm, Tue 6 Oct 2026 · Generated 8 Oct 2026, 11:41pm · Sample data · Made with Python (python-pptx)</a:t>
             </a:r>
           </a:p>
         </p:txBody>
@@ -5152,7 +5138,7 @@
                 </a:solidFill>
                 <a:latin typeface="Roboto"/>
               </a:rPr>
-              <a:t>3.9%</a:t>
+              <a:t>3.8%</a:t>
             </a:r>
           </a:p>
         </p:txBody>
@@ -5318,7 +5304,7 @@
                 </a:solidFill>
                 <a:latin typeface="Roboto"/>
               </a:rPr>
-              <a:t>39.5 h</a:t>
+              <a:t>32.0 h</a:t>
             </a:r>
           </a:p>
         </p:txBody>
@@ -5357,7 +5343,7 @@
                 </a:solidFill>
                 <a:latin typeface="Roboto"/>
               </a:rPr>
-              <a:t>October 46.0 h</a:t>
+              <a:t>October 38.0 h</a:t>
             </a:r>
           </a:p>
         </p:txBody>
@@ -5484,7 +5470,7 @@
                 </a:solidFill>
                 <a:latin typeface="Roboto"/>
               </a:rPr>
-              <a:t>1.3%</a:t>
+              <a:t>2.7%</a:t>
             </a:r>
           </a:p>
         </p:txBody>
@@ -5523,7 +5509,7 @@
                 </a:solidFill>
                 <a:latin typeface="Roboto"/>
               </a:rPr>
-              <a:t>14.0 h of overtime</a:t>
+              <a:t>23.5 h of overtime</a:t>
             </a:r>
           </a:p>
         </p:txBody>
@@ -5668,7 +5654,7 @@
                 </a:solidFill>
                 <a:latin typeface="Roboto"/>
               </a:rPr>
-              <a:t>Technicians worked 39.5 h of overtime in November, 3.9% of ordinary hours (target under 5.0%), against 4.0% in October. Over the last year it has gone from 1.3% to 3.9%.</a:t>
+              <a:t>Technicians worked 32.0 h of overtime in November, 3.8% of ordinary hours (target under 5.0%), against 3.9% in October. Over the last year it has gone from 2.7% to 3.8%.</a:t>
             </a:r>
           </a:p>
         </p:txBody>
@@ -5795,7 +5781,7 @@
                 </a:solidFill>
                 <a:latin typeface="Roboto"/>
               </a:rPr>
-              <a:t>After-hours call-out is the main reason: 28.5 h, 72.2% of the overtime. Technician T7 carried the most (9.5 h).</a:t>
+              <a:t>After-hours call-out is the main reason: 13.5 h, 42.2% of the overtime. Technician T5 carried the most (12.5 h).</a:t>
             </a:r>
           </a:p>
         </p:txBody>
@@ -5873,7 +5859,7 @@
                 </a:solidFill>
                 <a:latin typeface="Roboto"/>
               </a:rPr>
-              <a:t>Data retrieved 2pm, Tue 6 Oct 2026 · Generated 8 Oct 2026, 6:29pm · Sample data · Made with Python (python-pptx)</a:t>
+              <a:t>Data retrieved 2pm, Tue 6 Oct 2026 · Generated 8 Oct 2026, 11:41pm · Sample data · Made with Python (python-pptx)</a:t>
             </a:r>
           </a:p>
         </p:txBody>
@@ -6188,7 +6174,7 @@
                 </a:solidFill>
                 <a:latin typeface="Roboto"/>
               </a:rPr>
-              <a:t>Data retrieved 2pm, Tue 6 Oct 2026 · Generated 8 Oct 2026, 6:29pm · Sample data · Made with Python (python-pptx)</a:t>
+              <a:t>Data retrieved 2pm, Tue 6 Oct 2026 · Generated 8 Oct 2026, 11:41pm · Sample data · Made with Python (python-pptx)</a:t>
             </a:r>
           </a:p>
         </p:txBody>
@@ -6503,7 +6489,7 @@
                 </a:solidFill>
                 <a:latin typeface="Roboto"/>
               </a:rPr>
-              <a:t>Data retrieved 2pm, Tue 6 Oct 2026 · Generated 8 Oct 2026, 6:29pm · Sample data · Made with Python (python-pptx)</a:t>
+              <a:t>Data retrieved 2pm, Tue 6 Oct 2026 · Generated 8 Oct 2026, 11:41pm · Sample data · Made with Python (python-pptx)</a:t>
             </a:r>
           </a:p>
         </p:txBody>

--- a/media/exports/reports/2025-11/overtime.pptx
+++ b/media/exports/reports/2025-11/overtime.pptx
@@ -1167,7 +1167,7 @@
           <a:lstStyle/>
           <a:p>
             <a:r>
-              <a:t>Where is overtime creeping up, and why?. Sample Electrical &amp; Air Pty Ltd. Period: November 2025. Each technician's paid hours, day by day: ordinary hours and overtime, with the main reason for the overtime.</a:t>
+              <a:t>Where is overtime creeping up, and why?. Sample Electrical &amp; Air Pty Ltd. Period: November 2025. In short: Overtime was 3.8% of ordinary hours in November (target under 5.0%), up from 2.7% a year earlier. Each technician's paid hours, day by day: ordinary hours and overtime, with the main reason for the overtime.</a:t>
             </a:r>
           </a:p>
         </p:txBody>
@@ -4627,7 +4627,7 @@
                 </a:solidFill>
                 <a:latin typeface="Roboto"/>
               </a:rPr>
-              <a:t>Period: November 2025. Each technician's paid hours, day by day: ordinary hours and overtime, with the main reason for the overtime.</a:t>
+              <a:t>Period: November 2025. In short: Overtime was 3.8% of ordinary hours in November (target under 5.0%), up from 2.7% a year earlier. Each technician's paid hours, day by day: ordinary hours and overtime, with the main reason for the overtime.</a:t>
             </a:r>
           </a:p>
         </p:txBody>
@@ -4792,7 +4792,7 @@
                 </a:solidFill>
                 <a:latin typeface="Roboto"/>
               </a:rPr>
-              <a:t>Data retrieved 2pm, Tue 6 Oct 2026 · Generated 8 Oct 2026, 11:41pm · Sample data · Made with Python (python-pptx)</a:t>
+              <a:t>Data retrieved 2pm, Tue 6 Oct 2026 · Generated 10 Oct 2026, 9:55pm · Sample data · Made with Python (python-pptx)</a:t>
             </a:r>
           </a:p>
         </p:txBody>
@@ -5859,7 +5859,7 @@
                 </a:solidFill>
                 <a:latin typeface="Roboto"/>
               </a:rPr>
-              <a:t>Data retrieved 2pm, Tue 6 Oct 2026 · Generated 8 Oct 2026, 11:41pm · Sample data · Made with Python (python-pptx)</a:t>
+              <a:t>Data retrieved 2pm, Tue 6 Oct 2026 · Generated 10 Oct 2026, 9:55pm · Sample data · Made with Python (python-pptx)</a:t>
             </a:r>
           </a:p>
         </p:txBody>
@@ -6174,7 +6174,7 @@
                 </a:solidFill>
                 <a:latin typeface="Roboto"/>
               </a:rPr>
-              <a:t>Data retrieved 2pm, Tue 6 Oct 2026 · Generated 8 Oct 2026, 11:41pm · Sample data · Made with Python (python-pptx)</a:t>
+              <a:t>Data retrieved 2pm, Tue 6 Oct 2026 · Generated 10 Oct 2026, 9:55pm · Sample data · Made with Python (python-pptx)</a:t>
             </a:r>
           </a:p>
         </p:txBody>
@@ -6489,7 +6489,7 @@
                 </a:solidFill>
                 <a:latin typeface="Roboto"/>
               </a:rPr>
-              <a:t>Data retrieved 2pm, Tue 6 Oct 2026 · Generated 8 Oct 2026, 11:41pm · Sample data · Made with Python (python-pptx)</a:t>
+              <a:t>Data retrieved 2pm, Tue 6 Oct 2026 · Generated 10 Oct 2026, 9:55pm · Sample data · Made with Python (python-pptx)</a:t>
             </a:r>
           </a:p>
         </p:txBody>
